--- a/images/people/people.pptx
+++ b/images/people/people.pptx
@@ -243,7 +243,7 @@
           <a:p>
             <a:fld id="{34570D25-7F68-6347-AA42-4DCACACEA422}" type="datetimeFigureOut">
               <a:rPr lang="en-US" smtClean="0"/>
-              <a:t>7/11/20</a:t>
+              <a:t>7/23/20</a:t>
             </a:fld>
             <a:endParaRPr lang="en-US"/>
           </a:p>
@@ -413,7 +413,7 @@
           <a:p>
             <a:fld id="{34570D25-7F68-6347-AA42-4DCACACEA422}" type="datetimeFigureOut">
               <a:rPr lang="en-US" smtClean="0"/>
-              <a:t>7/11/20</a:t>
+              <a:t>7/23/20</a:t>
             </a:fld>
             <a:endParaRPr lang="en-US"/>
           </a:p>
@@ -593,7 +593,7 @@
           <a:p>
             <a:fld id="{34570D25-7F68-6347-AA42-4DCACACEA422}" type="datetimeFigureOut">
               <a:rPr lang="en-US" smtClean="0"/>
-              <a:t>7/11/20</a:t>
+              <a:t>7/23/20</a:t>
             </a:fld>
             <a:endParaRPr lang="en-US"/>
           </a:p>
@@ -763,7 +763,7 @@
           <a:p>
             <a:fld id="{34570D25-7F68-6347-AA42-4DCACACEA422}" type="datetimeFigureOut">
               <a:rPr lang="en-US" smtClean="0"/>
-              <a:t>7/11/20</a:t>
+              <a:t>7/23/20</a:t>
             </a:fld>
             <a:endParaRPr lang="en-US"/>
           </a:p>
@@ -1009,7 +1009,7 @@
           <a:p>
             <a:fld id="{34570D25-7F68-6347-AA42-4DCACACEA422}" type="datetimeFigureOut">
               <a:rPr lang="en-US" smtClean="0"/>
-              <a:t>7/11/20</a:t>
+              <a:t>7/23/20</a:t>
             </a:fld>
             <a:endParaRPr lang="en-US"/>
           </a:p>
@@ -1241,7 +1241,7 @@
           <a:p>
             <a:fld id="{34570D25-7F68-6347-AA42-4DCACACEA422}" type="datetimeFigureOut">
               <a:rPr lang="en-US" smtClean="0"/>
-              <a:t>7/11/20</a:t>
+              <a:t>7/23/20</a:t>
             </a:fld>
             <a:endParaRPr lang="en-US"/>
           </a:p>
@@ -1608,7 +1608,7 @@
           <a:p>
             <a:fld id="{34570D25-7F68-6347-AA42-4DCACACEA422}" type="datetimeFigureOut">
               <a:rPr lang="en-US" smtClean="0"/>
-              <a:t>7/11/20</a:t>
+              <a:t>7/23/20</a:t>
             </a:fld>
             <a:endParaRPr lang="en-US"/>
           </a:p>
@@ -1726,7 +1726,7 @@
           <a:p>
             <a:fld id="{34570D25-7F68-6347-AA42-4DCACACEA422}" type="datetimeFigureOut">
               <a:rPr lang="en-US" smtClean="0"/>
-              <a:t>7/11/20</a:t>
+              <a:t>7/23/20</a:t>
             </a:fld>
             <a:endParaRPr lang="en-US"/>
           </a:p>
@@ -1821,7 +1821,7 @@
           <a:p>
             <a:fld id="{34570D25-7F68-6347-AA42-4DCACACEA422}" type="datetimeFigureOut">
               <a:rPr lang="en-US" smtClean="0"/>
-              <a:t>7/11/20</a:t>
+              <a:t>7/23/20</a:t>
             </a:fld>
             <a:endParaRPr lang="en-US"/>
           </a:p>
@@ -2098,7 +2098,7 @@
           <a:p>
             <a:fld id="{34570D25-7F68-6347-AA42-4DCACACEA422}" type="datetimeFigureOut">
               <a:rPr lang="en-US" smtClean="0"/>
-              <a:t>7/11/20</a:t>
+              <a:t>7/23/20</a:t>
             </a:fld>
             <a:endParaRPr lang="en-US"/>
           </a:p>
@@ -2355,7 +2355,7 @@
           <a:p>
             <a:fld id="{34570D25-7F68-6347-AA42-4DCACACEA422}" type="datetimeFigureOut">
               <a:rPr lang="en-US" smtClean="0"/>
-              <a:t>7/11/20</a:t>
+              <a:t>7/23/20</a:t>
             </a:fld>
             <a:endParaRPr lang="en-US"/>
           </a:p>
@@ -2568,7 +2568,7 @@
           <a:p>
             <a:fld id="{34570D25-7F68-6347-AA42-4DCACACEA422}" type="datetimeFigureOut">
               <a:rPr lang="en-US" smtClean="0"/>
-              <a:t>7/11/20</a:t>
+              <a:t>7/23/20</a:t>
             </a:fld>
             <a:endParaRPr lang="en-US"/>
           </a:p>
@@ -3085,13 +3085,42 @@
         </p:nvPicPr>
         <p:blipFill rotWithShape="1">
           <a:blip r:embed="rId5"/>
-          <a:srcRect t="2778" r="1685"/>
+          <a:srcRect l="1467" t="5829" r="2440" b="-395"/>
+          <a:stretch/>
+        </p:blipFill>
+        <p:spPr>
+          <a:xfrm>
+            <a:off x="5359400" y="4571953"/>
+            <a:ext cx="4445813" cy="4424248"/>
+          </a:xfrm>
+          <a:prstGeom prst="rect">
+            <a:avLst/>
+          </a:prstGeom>
+        </p:spPr>
+      </p:pic>
+      <p:pic>
+        <p:nvPicPr>
+          <p:cNvPr id="3" name="Picture 2" descr="A person wearing a suit and tie smiling at the camera&#10;&#10;Description automatically generated">
+            <a:extLst>
+              <a:ext uri="{FF2B5EF4-FFF2-40B4-BE49-F238E27FC236}">
+                <a16:creationId xmlns:a16="http://schemas.microsoft.com/office/drawing/2014/main" id="{8CECCE81-1E11-254C-A204-F20319FF341A}"/>
+              </a:ext>
+            </a:extLst>
+          </p:cNvPr>
+          <p:cNvPicPr>
+            <a:picLocks noChangeAspect="1"/>
+          </p:cNvPicPr>
+          <p:nvPr/>
+        </p:nvPicPr>
+        <p:blipFill rotWithShape="1">
+          <a:blip r:embed="rId6"/>
+          <a:srcRect l="9438" t="3" r="3208" b="29689"/>
           <a:stretch/>
         </p:blipFill>
         <p:spPr>
           <a:xfrm>
             <a:off x="914400" y="4553486"/>
-            <a:ext cx="4445000" cy="4445000"/>
+            <a:ext cx="4445000" cy="4442715"/>
           </a:xfrm>
           <a:prstGeom prst="rect">
             <a:avLst/>
